--- a/LabBook_20.pptx
+++ b/LabBook_20.pptx
@@ -24,8 +24,8 @@
     <p:sldId id="299" r:id="rId12"/>
     <p:sldId id="300" r:id="rId13"/>
     <p:sldId id="301" r:id="rId14"/>
-    <p:sldId id="297" r:id="rId15"/>
-    <p:sldId id="290" r:id="rId16"/>
+    <p:sldId id="290" r:id="rId15"/>
+    <p:sldId id="297" r:id="rId16"/>
     <p:sldId id="292" r:id="rId17"/>
     <p:sldId id="298" r:id="rId18"/>
     <p:sldId id="288" r:id="rId19"/>
@@ -819,7 +819,7 @@
           <a:p>
             <a:fld id="{8438F8DC-35B0-48E6-A86E-42F1F08DD00F}" type="datetimeFigureOut">
               <a:rPr lang="es-ES" smtClean="0"/>
-              <a:t>04/03/2026</a:t>
+              <a:t>09/03/2026</a:t>
             </a:fld>
             <a:endParaRPr lang="es-ES"/>
           </a:p>
@@ -996,7 +996,7 @@
           <a:p>
             <a:fld id="{FACBDC12-F39B-4B97-8F4D-6734F9D366FF}" type="datetimeFigureOut">
               <a:rPr lang="es-ES" smtClean="0"/>
-              <a:t>04/03/2026</a:t>
+              <a:t>09/03/2026</a:t>
             </a:fld>
             <a:endParaRPr lang="es-ES"/>
           </a:p>
@@ -1352,6 +1352,90 @@
   <p:cSld>
     <p:spTree>
       <p:nvGrpSpPr>
+        <p:cNvPr id="1" name=""/>
+        <p:cNvGrpSpPr/>
+        <p:nvPr/>
+      </p:nvGrpSpPr>
+      <p:grpSpPr>
+        <a:xfrm>
+          <a:off x="0" y="0"/>
+          <a:ext cx="0" cy="0"/>
+          <a:chOff x="0" y="0"/>
+          <a:chExt cx="0" cy="0"/>
+        </a:xfrm>
+      </p:grpSpPr>
+      <p:sp>
+        <p:nvSpPr>
+          <p:cNvPr id="2" name="Marcador de imagen de diapositiva 1"/>
+          <p:cNvSpPr>
+            <a:spLocks noGrp="1" noRot="1" noChangeAspect="1"/>
+          </p:cNvSpPr>
+          <p:nvPr>
+            <p:ph type="sldImg"/>
+          </p:nvPr>
+        </p:nvSpPr>
+        <p:spPr/>
+      </p:sp>
+      <p:sp>
+        <p:nvSpPr>
+          <p:cNvPr id="3" name="Marcador de notas 2"/>
+          <p:cNvSpPr>
+            <a:spLocks noGrp="1"/>
+          </p:cNvSpPr>
+          <p:nvPr>
+            <p:ph type="body" idx="1"/>
+          </p:nvPr>
+        </p:nvSpPr>
+        <p:spPr/>
+        <p:txBody>
+          <a:bodyPr/>
+          <a:lstStyle/>
+          <a:p>
+            <a:endParaRPr lang="es-ES" dirty="0"/>
+          </a:p>
+        </p:txBody>
+      </p:sp>
+      <p:sp>
+        <p:nvSpPr>
+          <p:cNvPr id="4" name="Marcador de número de diapositiva 3"/>
+          <p:cNvSpPr>
+            <a:spLocks noGrp="1"/>
+          </p:cNvSpPr>
+          <p:nvPr>
+            <p:ph type="sldNum" sz="quarter" idx="5"/>
+          </p:nvPr>
+        </p:nvSpPr>
+        <p:spPr/>
+        <p:txBody>
+          <a:bodyPr/>
+          <a:lstStyle/>
+          <a:p>
+            <a:fld id="{676223B9-C868-4436-87D9-1A3152E1157A}" type="slidenum">
+              <a:rPr lang="es-ES" smtClean="0"/>
+              <a:t>14</a:t>
+            </a:fld>
+            <a:endParaRPr lang="es-ES"/>
+          </a:p>
+        </p:txBody>
+      </p:sp>
+    </p:spTree>
+    <p:extLst>
+      <p:ext uri="{BB962C8B-B14F-4D97-AF65-F5344CB8AC3E}">
+        <p14:creationId xmlns:p14="http://schemas.microsoft.com/office/powerpoint/2010/main" val="942232946"/>
+      </p:ext>
+    </p:extLst>
+  </p:cSld>
+  <p:clrMapOvr>
+    <a:masterClrMapping/>
+  </p:clrMapOvr>
+</p:notes>
+</file>
+
+<file path=ppt/notesSlides/notesSlide11.xml><?xml version="1.0" encoding="utf-8"?>
+<p:notes xmlns:a="http://schemas.openxmlformats.org/drawingml/2006/main" xmlns:r="http://schemas.openxmlformats.org/officeDocument/2006/relationships" xmlns:p="http://schemas.openxmlformats.org/presentationml/2006/main">
+  <p:cSld>
+    <p:spTree>
+      <p:nvGrpSpPr>
         <p:cNvPr id="1" name="">
           <a:extLst>
             <a:ext uri="{FF2B5EF4-FFF2-40B4-BE49-F238E27FC236}">
@@ -1436,7 +1520,7 @@
           <a:p>
             <a:fld id="{676223B9-C868-4436-87D9-1A3152E1157A}" type="slidenum">
               <a:rPr lang="es-ES" smtClean="0"/>
-              <a:t>14</a:t>
+              <a:t>15</a:t>
             </a:fld>
             <a:endParaRPr lang="es-ES"/>
           </a:p>
@@ -1446,90 +1530,6 @@
     <p:extLst>
       <p:ext uri="{BB962C8B-B14F-4D97-AF65-F5344CB8AC3E}">
         <p14:creationId xmlns:p14="http://schemas.microsoft.com/office/powerpoint/2010/main" val="1581859005"/>
-      </p:ext>
-    </p:extLst>
-  </p:cSld>
-  <p:clrMapOvr>
-    <a:masterClrMapping/>
-  </p:clrMapOvr>
-</p:notes>
-</file>
-
-<file path=ppt/notesSlides/notesSlide11.xml><?xml version="1.0" encoding="utf-8"?>
-<p:notes xmlns:a="http://schemas.openxmlformats.org/drawingml/2006/main" xmlns:r="http://schemas.openxmlformats.org/officeDocument/2006/relationships" xmlns:p="http://schemas.openxmlformats.org/presentationml/2006/main">
-  <p:cSld>
-    <p:spTree>
-      <p:nvGrpSpPr>
-        <p:cNvPr id="1" name=""/>
-        <p:cNvGrpSpPr/>
-        <p:nvPr/>
-      </p:nvGrpSpPr>
-      <p:grpSpPr>
-        <a:xfrm>
-          <a:off x="0" y="0"/>
-          <a:ext cx="0" cy="0"/>
-          <a:chOff x="0" y="0"/>
-          <a:chExt cx="0" cy="0"/>
-        </a:xfrm>
-      </p:grpSpPr>
-      <p:sp>
-        <p:nvSpPr>
-          <p:cNvPr id="2" name="Marcador de imagen de diapositiva 1"/>
-          <p:cNvSpPr>
-            <a:spLocks noGrp="1" noRot="1" noChangeAspect="1"/>
-          </p:cNvSpPr>
-          <p:nvPr>
-            <p:ph type="sldImg"/>
-          </p:nvPr>
-        </p:nvSpPr>
-        <p:spPr/>
-      </p:sp>
-      <p:sp>
-        <p:nvSpPr>
-          <p:cNvPr id="3" name="Marcador de notas 2"/>
-          <p:cNvSpPr>
-            <a:spLocks noGrp="1"/>
-          </p:cNvSpPr>
-          <p:nvPr>
-            <p:ph type="body" idx="1"/>
-          </p:nvPr>
-        </p:nvSpPr>
-        <p:spPr/>
-        <p:txBody>
-          <a:bodyPr/>
-          <a:lstStyle/>
-          <a:p>
-            <a:endParaRPr lang="es-ES" dirty="0"/>
-          </a:p>
-        </p:txBody>
-      </p:sp>
-      <p:sp>
-        <p:nvSpPr>
-          <p:cNvPr id="4" name="Marcador de número de diapositiva 3"/>
-          <p:cNvSpPr>
-            <a:spLocks noGrp="1"/>
-          </p:cNvSpPr>
-          <p:nvPr>
-            <p:ph type="sldNum" sz="quarter" idx="5"/>
-          </p:nvPr>
-        </p:nvSpPr>
-        <p:spPr/>
-        <p:txBody>
-          <a:bodyPr/>
-          <a:lstStyle/>
-          <a:p>
-            <a:fld id="{676223B9-C868-4436-87D9-1A3152E1157A}" type="slidenum">
-              <a:rPr lang="es-ES" smtClean="0"/>
-              <a:t>15</a:t>
-            </a:fld>
-            <a:endParaRPr lang="es-ES"/>
-          </a:p>
-        </p:txBody>
-      </p:sp>
-    </p:spTree>
-    <p:extLst>
-      <p:ext uri="{BB962C8B-B14F-4D97-AF65-F5344CB8AC3E}">
-        <p14:creationId xmlns:p14="http://schemas.microsoft.com/office/powerpoint/2010/main" val="942232946"/>
       </p:ext>
     </p:extLst>
   </p:cSld>
@@ -5921,6 +5921,692 @@
         <p:cNvPr id="1" name="">
           <a:extLst>
             <a:ext uri="{FF2B5EF4-FFF2-40B4-BE49-F238E27FC236}">
+              <a16:creationId xmlns:a16="http://schemas.microsoft.com/office/drawing/2014/main" id="{AE80DA9C-35AF-A1D7-01E5-BFD9DEF1550F}"/>
+            </a:ext>
+          </a:extLst>
+        </p:cNvPr>
+        <p:cNvGrpSpPr/>
+        <p:nvPr/>
+      </p:nvGrpSpPr>
+      <p:grpSpPr>
+        <a:xfrm>
+          <a:off x="0" y="0"/>
+          <a:ext cx="0" cy="0"/>
+          <a:chOff x="0" y="0"/>
+          <a:chExt cx="0" cy="0"/>
+        </a:xfrm>
+      </p:grpSpPr>
+      <p:sp>
+        <p:nvSpPr>
+          <p:cNvPr id="16" name="object 16">
+            <a:extLst>
+              <a:ext uri="{FF2B5EF4-FFF2-40B4-BE49-F238E27FC236}">
+                <a16:creationId xmlns:a16="http://schemas.microsoft.com/office/drawing/2014/main" id="{471E1424-6C4B-2D9A-1352-30AFB987AD41}"/>
+              </a:ext>
+            </a:extLst>
+          </p:cNvPr>
+          <p:cNvSpPr txBox="1">
+            <a:spLocks noGrp="1"/>
+          </p:cNvSpPr>
+          <p:nvPr>
+            <p:ph type="title"/>
+          </p:nvPr>
+        </p:nvSpPr>
+        <p:spPr>
+          <a:xfrm>
+            <a:off x="685800" y="408883"/>
+            <a:ext cx="10994410" cy="1090042"/>
+          </a:xfrm>
+          <a:prstGeom prst="rect">
+            <a:avLst/>
+          </a:prstGeom>
+        </p:spPr>
+        <p:txBody>
+          <a:bodyPr vert="horz" wrap="square" lIns="0" tIns="12700" rIns="0" bIns="0" rtlCol="0">
+            <a:spAutoFit/>
+          </a:bodyPr>
+          <a:lstStyle/>
+          <a:p>
+            <a:pPr marL="12700">
+              <a:lnSpc>
+                <a:spcPct val="100000"/>
+              </a:lnSpc>
+              <a:spcBef>
+                <a:spcPts val="100"/>
+              </a:spcBef>
+            </a:pPr>
+            <a:r>
+              <a:rPr lang="en-US" sz="2500" dirty="0"/>
+              <a:t>Extra #1 – Directional coupler gap dependence</a:t>
+            </a:r>
+            <a:br>
+              <a:rPr lang="en-US" sz="2500" dirty="0"/>
+            </a:br>
+            <a:r>
+              <a:rPr lang="en-US" b="0" dirty="0"/>
+              <a:t>Wavelength 1.55 µm, width 1.0 µm, </a:t>
+            </a:r>
+            <a:r>
+              <a:rPr lang="en-US" dirty="0"/>
+              <a:t>gap 0.2-2.4 µm </a:t>
+            </a:r>
+            <a:r>
+              <a:rPr lang="en-US" b="0" dirty="0"/>
+              <a:t>(step 0.2 µm)</a:t>
+            </a:r>
+            <a:br>
+              <a:rPr lang="es-ES" sz="2500" spc="-5" dirty="0">
+                <a:latin typeface="+mj-lt"/>
+                <a:cs typeface="Lucida Sans"/>
+              </a:rPr>
+            </a:br>
+            <a:endParaRPr sz="2500" b="0" dirty="0">
+              <a:latin typeface="+mj-lt"/>
+              <a:cs typeface="Lucida Sans"/>
+            </a:endParaRPr>
+          </a:p>
+        </p:txBody>
+      </p:sp>
+      <p:pic>
+        <p:nvPicPr>
+          <p:cNvPr id="83" name="Gráfico 82">
+            <a:extLst>
+              <a:ext uri="{FF2B5EF4-FFF2-40B4-BE49-F238E27FC236}">
+                <a16:creationId xmlns:a16="http://schemas.microsoft.com/office/drawing/2014/main" id="{9DCFD462-4416-65F8-5696-B0135B632765}"/>
+              </a:ext>
+            </a:extLst>
+          </p:cNvPr>
+          <p:cNvPicPr>
+            <a:picLocks noChangeAspect="1"/>
+          </p:cNvPicPr>
+          <p:nvPr/>
+        </p:nvPicPr>
+        <p:blipFill>
+          <a:blip r:embed="rId3">
+            <a:extLst>
+              <a:ext uri="{96DAC541-7B7A-43D3-8B79-37D633B846F1}">
+                <asvg:svgBlip xmlns:asvg="http://schemas.microsoft.com/office/drawing/2016/SVG/main" r:embed="rId4"/>
+              </a:ext>
+            </a:extLst>
+          </a:blip>
+          <a:stretch>
+            <a:fillRect/>
+          </a:stretch>
+        </p:blipFill>
+        <p:spPr>
+          <a:xfrm>
+            <a:off x="5045006" y="6356057"/>
+            <a:ext cx="6409575" cy="363174"/>
+          </a:xfrm>
+          <a:prstGeom prst="rect">
+            <a:avLst/>
+          </a:prstGeom>
+        </p:spPr>
+      </p:pic>
+      <p:sp>
+        <p:nvSpPr>
+          <p:cNvPr id="84" name="Marcador de número de diapositiva 83">
+            <a:extLst>
+              <a:ext uri="{FF2B5EF4-FFF2-40B4-BE49-F238E27FC236}">
+                <a16:creationId xmlns:a16="http://schemas.microsoft.com/office/drawing/2014/main" id="{293F5C1D-AFFF-4EA6-CA59-6503F34EBF5F}"/>
+              </a:ext>
+            </a:extLst>
+          </p:cNvPr>
+          <p:cNvSpPr>
+            <a:spLocks noGrp="1"/>
+          </p:cNvSpPr>
+          <p:nvPr>
+            <p:ph type="sldNum" sz="quarter" idx="7"/>
+          </p:nvPr>
+        </p:nvSpPr>
+        <p:spPr/>
+        <p:txBody>
+          <a:bodyPr/>
+          <a:lstStyle/>
+          <a:p>
+            <a:fld id="{B6F15528-21DE-4FAA-801E-634DDDAF4B2B}" type="slidenum">
+              <a:rPr lang="es-ES" smtClean="0"/>
+              <a:t>14</a:t>
+            </a:fld>
+            <a:endParaRPr lang="es-ES"/>
+          </a:p>
+        </p:txBody>
+      </p:sp>
+      <p:sp>
+        <p:nvSpPr>
+          <p:cNvPr id="3" name="Marcador de pie de página 2">
+            <a:extLst>
+              <a:ext uri="{FF2B5EF4-FFF2-40B4-BE49-F238E27FC236}">
+                <a16:creationId xmlns:a16="http://schemas.microsoft.com/office/drawing/2014/main" id="{34F13AC1-9668-7266-DF5B-D7CE084AB044}"/>
+              </a:ext>
+            </a:extLst>
+          </p:cNvPr>
+          <p:cNvSpPr>
+            <a:spLocks noGrp="1"/>
+          </p:cNvSpPr>
+          <p:nvPr>
+            <p:ph type="ftr" sz="quarter" idx="5"/>
+          </p:nvPr>
+        </p:nvSpPr>
+        <p:spPr/>
+        <p:txBody>
+          <a:bodyPr/>
+          <a:lstStyle/>
+          <a:p>
+            <a:pPr marL="12700">
+              <a:spcBef>
+                <a:spcPts val="15"/>
+              </a:spcBef>
+            </a:pPr>
+            <a:r>
+              <a:rPr lang="es-ES" spc="-5"/>
+              <a:t>LAB 2.0. COUPLERS</a:t>
+            </a:r>
+            <a:endParaRPr lang="es-ES" spc="-5" dirty="0"/>
+          </a:p>
+        </p:txBody>
+      </p:sp>
+      <p:sp>
+        <p:nvSpPr>
+          <p:cNvPr id="2" name="CuadroTexto 1">
+            <a:extLst>
+              <a:ext uri="{FF2B5EF4-FFF2-40B4-BE49-F238E27FC236}">
+                <a16:creationId xmlns:a16="http://schemas.microsoft.com/office/drawing/2014/main" id="{D0F8CF3B-B920-DBFC-F825-0C87B51EADA7}"/>
+              </a:ext>
+            </a:extLst>
+          </p:cNvPr>
+          <p:cNvSpPr txBox="1"/>
+          <p:nvPr/>
+        </p:nvSpPr>
+        <p:spPr>
+          <a:xfrm>
+            <a:off x="609441" y="4860334"/>
+            <a:ext cx="11199971" cy="1015663"/>
+          </a:xfrm>
+          <a:prstGeom prst="rect">
+            <a:avLst/>
+          </a:prstGeom>
+          <a:solidFill>
+            <a:schemeClr val="bg1">
+              <a:lumMod val="95000"/>
+            </a:schemeClr>
+          </a:solidFill>
+          <a:ln w="28575">
+            <a:solidFill>
+              <a:srgbClr val="E0700D"/>
+            </a:solidFill>
+          </a:ln>
+        </p:spPr>
+        <p:txBody>
+          <a:bodyPr wrap="square" rtlCol="0">
+            <a:spAutoFit/>
+          </a:bodyPr>
+          <a:lstStyle/>
+          <a:p>
+            <a:pPr algn="just"/>
+            <a:r>
+              <a:rPr lang="en-US" sz="1200" dirty="0">
+                <a:latin typeface="Arial" panose="020B0604020202020204" pitchFamily="34" charset="0"/>
+                <a:cs typeface="Arial" panose="020B0604020202020204" pitchFamily="34" charset="0"/>
+              </a:rPr>
+              <a:t>Make conclusions and observations from your results</a:t>
+            </a:r>
+          </a:p>
+          <a:p>
+            <a:pPr algn="just"/>
+            <a:endParaRPr lang="en-US" sz="1200" dirty="0">
+              <a:latin typeface="Arial" panose="020B0604020202020204" pitchFamily="34" charset="0"/>
+              <a:cs typeface="Arial" panose="020B0604020202020204" pitchFamily="34" charset="0"/>
+            </a:endParaRPr>
+          </a:p>
+          <a:p>
+            <a:pPr algn="just"/>
+            <a:endParaRPr lang="en-US" sz="1200" dirty="0">
+              <a:latin typeface="Arial" panose="020B0604020202020204" pitchFamily="34" charset="0"/>
+              <a:cs typeface="Arial" panose="020B0604020202020204" pitchFamily="34" charset="0"/>
+            </a:endParaRPr>
+          </a:p>
+          <a:p>
+            <a:pPr algn="just"/>
+            <a:endParaRPr lang="en-US" sz="1200" dirty="0">
+              <a:latin typeface="Arial" panose="020B0604020202020204" pitchFamily="34" charset="0"/>
+              <a:cs typeface="Arial" panose="020B0604020202020204" pitchFamily="34" charset="0"/>
+            </a:endParaRPr>
+          </a:p>
+          <a:p>
+            <a:pPr algn="just"/>
+            <a:endParaRPr lang="en-US" sz="1200" dirty="0">
+              <a:latin typeface="Arial" panose="020B0604020202020204" pitchFamily="34" charset="0"/>
+              <a:cs typeface="Arial" panose="020B0604020202020204" pitchFamily="34" charset="0"/>
+            </a:endParaRPr>
+          </a:p>
+        </p:txBody>
+      </p:sp>
+      <p:sp>
+        <p:nvSpPr>
+          <p:cNvPr id="5" name="Rectángulo 4">
+            <a:extLst>
+              <a:ext uri="{FF2B5EF4-FFF2-40B4-BE49-F238E27FC236}">
+                <a16:creationId xmlns:a16="http://schemas.microsoft.com/office/drawing/2014/main" id="{E7488849-10A1-FB48-F511-E57B062CD7E2}"/>
+              </a:ext>
+            </a:extLst>
+          </p:cNvPr>
+          <p:cNvSpPr/>
+          <p:nvPr/>
+        </p:nvSpPr>
+        <p:spPr>
+          <a:xfrm>
+            <a:off x="609441" y="1447800"/>
+            <a:ext cx="5486559" cy="3306028"/>
+          </a:xfrm>
+          <a:prstGeom prst="rect">
+            <a:avLst/>
+          </a:prstGeom>
+          <a:noFill/>
+          <a:ln w="28575">
+            <a:solidFill>
+              <a:srgbClr val="E0700D"/>
+            </a:solidFill>
+          </a:ln>
+        </p:spPr>
+        <p:style>
+          <a:lnRef idx="2">
+            <a:schemeClr val="accent1">
+              <a:shade val="15000"/>
+            </a:schemeClr>
+          </a:lnRef>
+          <a:fillRef idx="1">
+            <a:schemeClr val="accent1"/>
+          </a:fillRef>
+          <a:effectRef idx="0">
+            <a:schemeClr val="accent1"/>
+          </a:effectRef>
+          <a:fontRef idx="minor">
+            <a:schemeClr val="lt1"/>
+          </a:fontRef>
+        </p:style>
+        <p:txBody>
+          <a:bodyPr rtlCol="0" anchor="ctr"/>
+          <a:lstStyle/>
+          <a:p>
+            <a:pPr algn="ctr"/>
+            <a:endParaRPr lang="en-US"/>
+          </a:p>
+        </p:txBody>
+      </p:sp>
+      <p:sp>
+        <p:nvSpPr>
+          <p:cNvPr id="6" name="Rectángulo 5">
+            <a:extLst>
+              <a:ext uri="{FF2B5EF4-FFF2-40B4-BE49-F238E27FC236}">
+                <a16:creationId xmlns:a16="http://schemas.microsoft.com/office/drawing/2014/main" id="{68726DAB-1B5F-39D1-63A0-BB708EA6E17F}"/>
+              </a:ext>
+            </a:extLst>
+          </p:cNvPr>
+          <p:cNvSpPr/>
+          <p:nvPr/>
+        </p:nvSpPr>
+        <p:spPr>
+          <a:xfrm>
+            <a:off x="6321424" y="1447800"/>
+            <a:ext cx="5486559" cy="3306028"/>
+          </a:xfrm>
+          <a:prstGeom prst="rect">
+            <a:avLst/>
+          </a:prstGeom>
+          <a:noFill/>
+          <a:ln w="28575">
+            <a:solidFill>
+              <a:srgbClr val="E0700D"/>
+            </a:solidFill>
+          </a:ln>
+        </p:spPr>
+        <p:style>
+          <a:lnRef idx="2">
+            <a:schemeClr val="accent1">
+              <a:shade val="15000"/>
+            </a:schemeClr>
+          </a:lnRef>
+          <a:fillRef idx="1">
+            <a:schemeClr val="accent1"/>
+          </a:fillRef>
+          <a:effectRef idx="0">
+            <a:schemeClr val="accent1"/>
+          </a:effectRef>
+          <a:fontRef idx="minor">
+            <a:schemeClr val="lt1"/>
+          </a:fontRef>
+        </p:style>
+        <p:txBody>
+          <a:bodyPr rtlCol="0" anchor="ctr"/>
+          <a:lstStyle/>
+          <a:p>
+            <a:pPr algn="ctr"/>
+            <a:endParaRPr lang="en-US"/>
+          </a:p>
+        </p:txBody>
+      </p:sp>
+      <p:sp>
+        <p:nvSpPr>
+          <p:cNvPr id="7" name="CuadroTexto 6">
+            <a:extLst>
+              <a:ext uri="{FF2B5EF4-FFF2-40B4-BE49-F238E27FC236}">
+                <a16:creationId xmlns:a16="http://schemas.microsoft.com/office/drawing/2014/main" id="{6D309BFB-98FD-0CBA-3C6A-346D8859893B}"/>
+              </a:ext>
+            </a:extLst>
+          </p:cNvPr>
+          <p:cNvSpPr txBox="1"/>
+          <p:nvPr/>
+        </p:nvSpPr>
+        <p:spPr>
+          <a:xfrm>
+            <a:off x="6331152" y="4342178"/>
+            <a:ext cx="2269787" cy="369332"/>
+          </a:xfrm>
+          <a:prstGeom prst="rect">
+            <a:avLst/>
+          </a:prstGeom>
+          <a:noFill/>
+        </p:spPr>
+        <p:txBody>
+          <a:bodyPr wrap="square">
+            <a:spAutoFit/>
+          </a:bodyPr>
+          <a:lstStyle/>
+          <a:p>
+            <a:r>
+              <a:rPr lang="en-US" dirty="0"/>
+              <a:t>slab = 150nm</a:t>
+            </a:r>
+            <a:endParaRPr lang="es-ES" dirty="0"/>
+          </a:p>
+        </p:txBody>
+      </p:sp>
+      <mc:AlternateContent xmlns:mc="http://schemas.openxmlformats.org/markup-compatibility/2006" xmlns:a14="http://schemas.microsoft.com/office/drawing/2010/main">
+        <mc:Choice Requires="a14">
+          <p:sp>
+            <p:nvSpPr>
+              <p:cNvPr id="8" name="CuadroTexto 7">
+                <a:extLst>
+                  <a:ext uri="{FF2B5EF4-FFF2-40B4-BE49-F238E27FC236}">
+                    <a16:creationId xmlns:a16="http://schemas.microsoft.com/office/drawing/2014/main" id="{E9BD6C85-02F1-7B54-41E3-E3D9883786D8}"/>
+                  </a:ext>
+                </a:extLst>
+              </p:cNvPr>
+              <p:cNvSpPr txBox="1"/>
+              <p:nvPr/>
+            </p:nvSpPr>
+            <p:spPr>
+              <a:xfrm>
+                <a:off x="1079403" y="2709096"/>
+                <a:ext cx="4546634" cy="923330"/>
+              </a:xfrm>
+              <a:prstGeom prst="rect">
+                <a:avLst/>
+              </a:prstGeom>
+              <a:noFill/>
+            </p:spPr>
+            <p:txBody>
+              <a:bodyPr wrap="square" rtlCol="0">
+                <a:spAutoFit/>
+              </a:bodyPr>
+              <a:lstStyle/>
+              <a:p>
+                <a:pPr algn="ctr"/>
+                <a:r>
+                  <a:rPr lang="en-US" b="1" dirty="0"/>
+                  <a:t>deep</a:t>
+                </a:r>
+                <a:r>
+                  <a:rPr lang="en-US" dirty="0"/>
+                  <a:t> waveguide</a:t>
+                </a:r>
+              </a:p>
+              <a:p>
+                <a:pPr algn="ctr"/>
+                <a:endParaRPr lang="en-US" dirty="0"/>
+              </a:p>
+              <a:p>
+                <a:pPr algn="ctr"/>
+                <a:r>
+                  <a:rPr lang="en-US" dirty="0"/>
+                  <a:t>Paste </a:t>
+                </a:r>
+                <a14:m>
+                  <m:oMath xmlns:m="http://schemas.openxmlformats.org/officeDocument/2006/math">
+                    <m:sSub>
+                      <m:sSubPr>
+                        <m:ctrlPr>
+                          <a:rPr lang="es-ES" sz="1800" b="0" i="1" smtClean="0">
+                            <a:latin typeface="Cambria Math" panose="02040503050406030204" pitchFamily="18" charset="0"/>
+                          </a:rPr>
+                        </m:ctrlPr>
+                      </m:sSubPr>
+                      <m:e>
+                        <m:r>
+                          <a:rPr lang="es-ES" sz="1800" b="0" i="1" smtClean="0">
+                            <a:latin typeface="Cambria Math" panose="02040503050406030204" pitchFamily="18" charset="0"/>
+                          </a:rPr>
+                          <m:t>𝐿</m:t>
+                        </m:r>
+                      </m:e>
+                      <m:sub>
+                        <m:r>
+                          <a:rPr lang="es-ES" sz="1800" b="0" i="1" smtClean="0">
+                            <a:latin typeface="Cambria Math" panose="02040503050406030204" pitchFamily="18" charset="0"/>
+                          </a:rPr>
+                          <m:t>𝜋</m:t>
+                        </m:r>
+                      </m:sub>
+                    </m:sSub>
+                  </m:oMath>
+                </a14:m>
+                <a:r>
+                  <a:rPr lang="en-US" dirty="0"/>
+                  <a:t> vs gap for TE and TM plot here</a:t>
+                </a:r>
+              </a:p>
+            </p:txBody>
+          </p:sp>
+        </mc:Choice>
+        <mc:Fallback xmlns="">
+          <p:sp>
+            <p:nvSpPr>
+              <p:cNvPr id="8" name="CuadroTexto 7">
+                <a:extLst>
+                  <a:ext uri="{FF2B5EF4-FFF2-40B4-BE49-F238E27FC236}">
+                    <a16:creationId xmlns:a16="http://schemas.microsoft.com/office/drawing/2014/main" id="{E9BD6C85-02F1-7B54-41E3-E3D9883786D8}"/>
+                  </a:ext>
+                </a:extLst>
+              </p:cNvPr>
+              <p:cNvSpPr txBox="1">
+                <a:spLocks noRot="1" noChangeAspect="1" noMove="1" noResize="1" noEditPoints="1" noAdjustHandles="1" noChangeArrowheads="1" noChangeShapeType="1" noTextEdit="1"/>
+              </p:cNvSpPr>
+              <p:nvPr/>
+            </p:nvSpPr>
+            <p:spPr>
+              <a:xfrm>
+                <a:off x="1079403" y="2709096"/>
+                <a:ext cx="4546634" cy="923330"/>
+              </a:xfrm>
+              <a:prstGeom prst="rect">
+                <a:avLst/>
+              </a:prstGeom>
+              <a:blipFill>
+                <a:blip r:embed="rId5"/>
+                <a:stretch>
+                  <a:fillRect t="-3289" b="-9211"/>
+                </a:stretch>
+              </a:blipFill>
+            </p:spPr>
+            <p:txBody>
+              <a:bodyPr/>
+              <a:lstStyle/>
+              <a:p>
+                <a:r>
+                  <a:rPr lang="es-ES">
+                    <a:noFill/>
+                  </a:rPr>
+                  <a:t> </a:t>
+                </a:r>
+              </a:p>
+            </p:txBody>
+          </p:sp>
+        </mc:Fallback>
+      </mc:AlternateContent>
+      <mc:AlternateContent xmlns:mc="http://schemas.openxmlformats.org/markup-compatibility/2006" xmlns:a14="http://schemas.microsoft.com/office/drawing/2010/main">
+        <mc:Choice Requires="a14">
+          <p:sp>
+            <p:nvSpPr>
+              <p:cNvPr id="9" name="CuadroTexto 8">
+                <a:extLst>
+                  <a:ext uri="{FF2B5EF4-FFF2-40B4-BE49-F238E27FC236}">
+                    <a16:creationId xmlns:a16="http://schemas.microsoft.com/office/drawing/2014/main" id="{7431A41C-EEB3-44D0-4622-A915E258C8F0}"/>
+                  </a:ext>
+                </a:extLst>
+              </p:cNvPr>
+              <p:cNvSpPr txBox="1"/>
+              <p:nvPr/>
+            </p:nvSpPr>
+            <p:spPr>
+              <a:xfrm>
+                <a:off x="6883366" y="2709096"/>
+                <a:ext cx="4546634" cy="923330"/>
+              </a:xfrm>
+              <a:prstGeom prst="rect">
+                <a:avLst/>
+              </a:prstGeom>
+              <a:noFill/>
+            </p:spPr>
+            <p:txBody>
+              <a:bodyPr wrap="square" rtlCol="0">
+                <a:spAutoFit/>
+              </a:bodyPr>
+              <a:lstStyle/>
+              <a:p>
+                <a:pPr algn="ctr"/>
+                <a:r>
+                  <a:rPr lang="en-US" b="1" dirty="0"/>
+                  <a:t>shallow</a:t>
+                </a:r>
+                <a:r>
+                  <a:rPr lang="en-US" dirty="0"/>
+                  <a:t> waveguide</a:t>
+                </a:r>
+              </a:p>
+              <a:p>
+                <a:pPr algn="ctr"/>
+                <a:endParaRPr lang="en-US" dirty="0"/>
+              </a:p>
+              <a:p>
+                <a:pPr algn="ctr"/>
+                <a:r>
+                  <a:rPr lang="en-US" dirty="0"/>
+                  <a:t>Paste </a:t>
+                </a:r>
+                <a14:m>
+                  <m:oMath xmlns:m="http://schemas.openxmlformats.org/officeDocument/2006/math">
+                    <m:sSub>
+                      <m:sSubPr>
+                        <m:ctrlPr>
+                          <a:rPr lang="es-ES" sz="1800" b="0" i="1" smtClean="0">
+                            <a:latin typeface="Cambria Math" panose="02040503050406030204" pitchFamily="18" charset="0"/>
+                          </a:rPr>
+                        </m:ctrlPr>
+                      </m:sSubPr>
+                      <m:e>
+                        <m:r>
+                          <a:rPr lang="es-ES" sz="1800" b="0" i="1" smtClean="0">
+                            <a:latin typeface="Cambria Math" panose="02040503050406030204" pitchFamily="18" charset="0"/>
+                          </a:rPr>
+                          <m:t>𝐿</m:t>
+                        </m:r>
+                      </m:e>
+                      <m:sub>
+                        <m:r>
+                          <a:rPr lang="es-ES" sz="1800" b="0" i="1" smtClean="0">
+                            <a:latin typeface="Cambria Math" panose="02040503050406030204" pitchFamily="18" charset="0"/>
+                          </a:rPr>
+                          <m:t>𝜋</m:t>
+                        </m:r>
+                      </m:sub>
+                    </m:sSub>
+                  </m:oMath>
+                </a14:m>
+                <a:r>
+                  <a:rPr lang="en-US" dirty="0"/>
+                  <a:t> vs gap for TE and TM plot here</a:t>
+                </a:r>
+              </a:p>
+            </p:txBody>
+          </p:sp>
+        </mc:Choice>
+        <mc:Fallback xmlns="">
+          <p:sp>
+            <p:nvSpPr>
+              <p:cNvPr id="9" name="CuadroTexto 8">
+                <a:extLst>
+                  <a:ext uri="{FF2B5EF4-FFF2-40B4-BE49-F238E27FC236}">
+                    <a16:creationId xmlns:a16="http://schemas.microsoft.com/office/drawing/2014/main" id="{7431A41C-EEB3-44D0-4622-A915E258C8F0}"/>
+                  </a:ext>
+                </a:extLst>
+              </p:cNvPr>
+              <p:cNvSpPr txBox="1">
+                <a:spLocks noRot="1" noChangeAspect="1" noMove="1" noResize="1" noEditPoints="1" noAdjustHandles="1" noChangeArrowheads="1" noChangeShapeType="1" noTextEdit="1"/>
+              </p:cNvSpPr>
+              <p:nvPr/>
+            </p:nvSpPr>
+            <p:spPr>
+              <a:xfrm>
+                <a:off x="6883366" y="2709096"/>
+                <a:ext cx="4546634" cy="923330"/>
+              </a:xfrm>
+              <a:prstGeom prst="rect">
+                <a:avLst/>
+              </a:prstGeom>
+              <a:blipFill>
+                <a:blip r:embed="rId6"/>
+                <a:stretch>
+                  <a:fillRect t="-3289" b="-9211"/>
+                </a:stretch>
+              </a:blipFill>
+            </p:spPr>
+            <p:txBody>
+              <a:bodyPr/>
+              <a:lstStyle/>
+              <a:p>
+                <a:r>
+                  <a:rPr lang="es-ES">
+                    <a:noFill/>
+                  </a:rPr>
+                  <a:t> </a:t>
+                </a:r>
+              </a:p>
+            </p:txBody>
+          </p:sp>
+        </mc:Fallback>
+      </mc:AlternateContent>
+    </p:spTree>
+    <p:extLst>
+      <p:ext uri="{BB962C8B-B14F-4D97-AF65-F5344CB8AC3E}">
+        <p14:creationId xmlns:p14="http://schemas.microsoft.com/office/powerpoint/2010/main" val="179796361"/>
+      </p:ext>
+    </p:extLst>
+  </p:cSld>
+  <p:clrMapOvr>
+    <a:masterClrMapping/>
+  </p:clrMapOvr>
+</p:sld>
+</file>
+
+<file path=ppt/slides/slide15.xml><?xml version="1.0" encoding="utf-8"?>
+<p:sld xmlns:a="http://schemas.openxmlformats.org/drawingml/2006/main" xmlns:r="http://schemas.openxmlformats.org/officeDocument/2006/relationships" xmlns:p="http://schemas.openxmlformats.org/presentationml/2006/main">
+  <p:cSld>
+    <p:spTree>
+      <p:nvGrpSpPr>
+        <p:cNvPr id="1" name="">
+          <a:extLst>
+            <a:ext uri="{FF2B5EF4-FFF2-40B4-BE49-F238E27FC236}">
               <a16:creationId xmlns:a16="http://schemas.microsoft.com/office/drawing/2014/main" id="{44C60F79-E2ED-1B1B-6289-A1259E808584}"/>
             </a:ext>
           </a:extLst>
@@ -5977,7 +6663,7 @@
             </a:pPr>
             <a:r>
               <a:rPr lang="en-US" sz="2500" dirty="0"/>
-              <a:t>Extra #1 – Directional wavelength dependence</a:t>
+              <a:t>Extra #2 – Directional wavelength dependence</a:t>
             </a:r>
             <a:br>
               <a:rPr lang="en-US" sz="2500" dirty="0"/>
@@ -6069,7 +6755,7 @@
           <a:p>
             <a:fld id="{B6F15528-21DE-4FAA-801E-634DDDAF4B2B}" type="slidenum">
               <a:rPr lang="es-ES" smtClean="0"/>
-              <a:t>14</a:t>
+              <a:t>15</a:t>
             </a:fld>
             <a:endParaRPr lang="es-ES"/>
           </a:p>
@@ -6616,692 +7302,6 @@
     <p:extLst>
       <p:ext uri="{BB962C8B-B14F-4D97-AF65-F5344CB8AC3E}">
         <p14:creationId xmlns:p14="http://schemas.microsoft.com/office/powerpoint/2010/main" val="813558068"/>
-      </p:ext>
-    </p:extLst>
-  </p:cSld>
-  <p:clrMapOvr>
-    <a:masterClrMapping/>
-  </p:clrMapOvr>
-</p:sld>
-</file>
-
-<file path=ppt/slides/slide15.xml><?xml version="1.0" encoding="utf-8"?>
-<p:sld xmlns:a="http://schemas.openxmlformats.org/drawingml/2006/main" xmlns:r="http://schemas.openxmlformats.org/officeDocument/2006/relationships" xmlns:p="http://schemas.openxmlformats.org/presentationml/2006/main">
-  <p:cSld>
-    <p:spTree>
-      <p:nvGrpSpPr>
-        <p:cNvPr id="1" name="">
-          <a:extLst>
-            <a:ext uri="{FF2B5EF4-FFF2-40B4-BE49-F238E27FC236}">
-              <a16:creationId xmlns:a16="http://schemas.microsoft.com/office/drawing/2014/main" id="{AE80DA9C-35AF-A1D7-01E5-BFD9DEF1550F}"/>
-            </a:ext>
-          </a:extLst>
-        </p:cNvPr>
-        <p:cNvGrpSpPr/>
-        <p:nvPr/>
-      </p:nvGrpSpPr>
-      <p:grpSpPr>
-        <a:xfrm>
-          <a:off x="0" y="0"/>
-          <a:ext cx="0" cy="0"/>
-          <a:chOff x="0" y="0"/>
-          <a:chExt cx="0" cy="0"/>
-        </a:xfrm>
-      </p:grpSpPr>
-      <p:sp>
-        <p:nvSpPr>
-          <p:cNvPr id="16" name="object 16">
-            <a:extLst>
-              <a:ext uri="{FF2B5EF4-FFF2-40B4-BE49-F238E27FC236}">
-                <a16:creationId xmlns:a16="http://schemas.microsoft.com/office/drawing/2014/main" id="{471E1424-6C4B-2D9A-1352-30AFB987AD41}"/>
-              </a:ext>
-            </a:extLst>
-          </p:cNvPr>
-          <p:cNvSpPr txBox="1">
-            <a:spLocks noGrp="1"/>
-          </p:cNvSpPr>
-          <p:nvPr>
-            <p:ph type="title"/>
-          </p:nvPr>
-        </p:nvSpPr>
-        <p:spPr>
-          <a:xfrm>
-            <a:off x="685800" y="408883"/>
-            <a:ext cx="10994410" cy="1090042"/>
-          </a:xfrm>
-          <a:prstGeom prst="rect">
-            <a:avLst/>
-          </a:prstGeom>
-        </p:spPr>
-        <p:txBody>
-          <a:bodyPr vert="horz" wrap="square" lIns="0" tIns="12700" rIns="0" bIns="0" rtlCol="0">
-            <a:spAutoFit/>
-          </a:bodyPr>
-          <a:lstStyle/>
-          <a:p>
-            <a:pPr marL="12700">
-              <a:lnSpc>
-                <a:spcPct val="100000"/>
-              </a:lnSpc>
-              <a:spcBef>
-                <a:spcPts val="100"/>
-              </a:spcBef>
-            </a:pPr>
-            <a:r>
-              <a:rPr lang="en-US" sz="2500" dirty="0"/>
-              <a:t>Extra #2 – Directional coupler gap dependence</a:t>
-            </a:r>
-            <a:br>
-              <a:rPr lang="en-US" sz="2500" dirty="0"/>
-            </a:br>
-            <a:r>
-              <a:rPr lang="en-US" b="0" dirty="0"/>
-              <a:t>Wavelength 1.55 µm, width 1.0 µm, </a:t>
-            </a:r>
-            <a:r>
-              <a:rPr lang="en-US" dirty="0"/>
-              <a:t>gap 0.2-2.4 µm </a:t>
-            </a:r>
-            <a:r>
-              <a:rPr lang="en-US" b="0" dirty="0"/>
-              <a:t>(step 0.2 µm)</a:t>
-            </a:r>
-            <a:br>
-              <a:rPr lang="es-ES" sz="2500" spc="-5" dirty="0">
-                <a:latin typeface="+mj-lt"/>
-                <a:cs typeface="Lucida Sans"/>
-              </a:rPr>
-            </a:br>
-            <a:endParaRPr sz="2500" b="0" dirty="0">
-              <a:latin typeface="+mj-lt"/>
-              <a:cs typeface="Lucida Sans"/>
-            </a:endParaRPr>
-          </a:p>
-        </p:txBody>
-      </p:sp>
-      <p:pic>
-        <p:nvPicPr>
-          <p:cNvPr id="83" name="Gráfico 82">
-            <a:extLst>
-              <a:ext uri="{FF2B5EF4-FFF2-40B4-BE49-F238E27FC236}">
-                <a16:creationId xmlns:a16="http://schemas.microsoft.com/office/drawing/2014/main" id="{9DCFD462-4416-65F8-5696-B0135B632765}"/>
-              </a:ext>
-            </a:extLst>
-          </p:cNvPr>
-          <p:cNvPicPr>
-            <a:picLocks noChangeAspect="1"/>
-          </p:cNvPicPr>
-          <p:nvPr/>
-        </p:nvPicPr>
-        <p:blipFill>
-          <a:blip r:embed="rId3">
-            <a:extLst>
-              <a:ext uri="{96DAC541-7B7A-43D3-8B79-37D633B846F1}">
-                <asvg:svgBlip xmlns:asvg="http://schemas.microsoft.com/office/drawing/2016/SVG/main" r:embed="rId4"/>
-              </a:ext>
-            </a:extLst>
-          </a:blip>
-          <a:stretch>
-            <a:fillRect/>
-          </a:stretch>
-        </p:blipFill>
-        <p:spPr>
-          <a:xfrm>
-            <a:off x="5045006" y="6356057"/>
-            <a:ext cx="6409575" cy="363174"/>
-          </a:xfrm>
-          <a:prstGeom prst="rect">
-            <a:avLst/>
-          </a:prstGeom>
-        </p:spPr>
-      </p:pic>
-      <p:sp>
-        <p:nvSpPr>
-          <p:cNvPr id="84" name="Marcador de número de diapositiva 83">
-            <a:extLst>
-              <a:ext uri="{FF2B5EF4-FFF2-40B4-BE49-F238E27FC236}">
-                <a16:creationId xmlns:a16="http://schemas.microsoft.com/office/drawing/2014/main" id="{293F5C1D-AFFF-4EA6-CA59-6503F34EBF5F}"/>
-              </a:ext>
-            </a:extLst>
-          </p:cNvPr>
-          <p:cNvSpPr>
-            <a:spLocks noGrp="1"/>
-          </p:cNvSpPr>
-          <p:nvPr>
-            <p:ph type="sldNum" sz="quarter" idx="7"/>
-          </p:nvPr>
-        </p:nvSpPr>
-        <p:spPr/>
-        <p:txBody>
-          <a:bodyPr/>
-          <a:lstStyle/>
-          <a:p>
-            <a:fld id="{B6F15528-21DE-4FAA-801E-634DDDAF4B2B}" type="slidenum">
-              <a:rPr lang="es-ES" smtClean="0"/>
-              <a:t>15</a:t>
-            </a:fld>
-            <a:endParaRPr lang="es-ES"/>
-          </a:p>
-        </p:txBody>
-      </p:sp>
-      <p:sp>
-        <p:nvSpPr>
-          <p:cNvPr id="3" name="Marcador de pie de página 2">
-            <a:extLst>
-              <a:ext uri="{FF2B5EF4-FFF2-40B4-BE49-F238E27FC236}">
-                <a16:creationId xmlns:a16="http://schemas.microsoft.com/office/drawing/2014/main" id="{34F13AC1-9668-7266-DF5B-D7CE084AB044}"/>
-              </a:ext>
-            </a:extLst>
-          </p:cNvPr>
-          <p:cNvSpPr>
-            <a:spLocks noGrp="1"/>
-          </p:cNvSpPr>
-          <p:nvPr>
-            <p:ph type="ftr" sz="quarter" idx="5"/>
-          </p:nvPr>
-        </p:nvSpPr>
-        <p:spPr/>
-        <p:txBody>
-          <a:bodyPr/>
-          <a:lstStyle/>
-          <a:p>
-            <a:pPr marL="12700">
-              <a:spcBef>
-                <a:spcPts val="15"/>
-              </a:spcBef>
-            </a:pPr>
-            <a:r>
-              <a:rPr lang="es-ES" spc="-5"/>
-              <a:t>LAB 2.0. COUPLERS</a:t>
-            </a:r>
-            <a:endParaRPr lang="es-ES" spc="-5" dirty="0"/>
-          </a:p>
-        </p:txBody>
-      </p:sp>
-      <p:sp>
-        <p:nvSpPr>
-          <p:cNvPr id="2" name="CuadroTexto 1">
-            <a:extLst>
-              <a:ext uri="{FF2B5EF4-FFF2-40B4-BE49-F238E27FC236}">
-                <a16:creationId xmlns:a16="http://schemas.microsoft.com/office/drawing/2014/main" id="{D0F8CF3B-B920-DBFC-F825-0C87B51EADA7}"/>
-              </a:ext>
-            </a:extLst>
-          </p:cNvPr>
-          <p:cNvSpPr txBox="1"/>
-          <p:nvPr/>
-        </p:nvSpPr>
-        <p:spPr>
-          <a:xfrm>
-            <a:off x="609441" y="4860334"/>
-            <a:ext cx="11199971" cy="1015663"/>
-          </a:xfrm>
-          <a:prstGeom prst="rect">
-            <a:avLst/>
-          </a:prstGeom>
-          <a:solidFill>
-            <a:schemeClr val="bg1">
-              <a:lumMod val="95000"/>
-            </a:schemeClr>
-          </a:solidFill>
-          <a:ln w="28575">
-            <a:solidFill>
-              <a:srgbClr val="E0700D"/>
-            </a:solidFill>
-          </a:ln>
-        </p:spPr>
-        <p:txBody>
-          <a:bodyPr wrap="square" rtlCol="0">
-            <a:spAutoFit/>
-          </a:bodyPr>
-          <a:lstStyle/>
-          <a:p>
-            <a:pPr algn="just"/>
-            <a:r>
-              <a:rPr lang="en-US" sz="1200" dirty="0">
-                <a:latin typeface="Arial" panose="020B0604020202020204" pitchFamily="34" charset="0"/>
-                <a:cs typeface="Arial" panose="020B0604020202020204" pitchFamily="34" charset="0"/>
-              </a:rPr>
-              <a:t>Make conclusions and observations from your results</a:t>
-            </a:r>
-          </a:p>
-          <a:p>
-            <a:pPr algn="just"/>
-            <a:endParaRPr lang="en-US" sz="1200" dirty="0">
-              <a:latin typeface="Arial" panose="020B0604020202020204" pitchFamily="34" charset="0"/>
-              <a:cs typeface="Arial" panose="020B0604020202020204" pitchFamily="34" charset="0"/>
-            </a:endParaRPr>
-          </a:p>
-          <a:p>
-            <a:pPr algn="just"/>
-            <a:endParaRPr lang="en-US" sz="1200" dirty="0">
-              <a:latin typeface="Arial" panose="020B0604020202020204" pitchFamily="34" charset="0"/>
-              <a:cs typeface="Arial" panose="020B0604020202020204" pitchFamily="34" charset="0"/>
-            </a:endParaRPr>
-          </a:p>
-          <a:p>
-            <a:pPr algn="just"/>
-            <a:endParaRPr lang="en-US" sz="1200" dirty="0">
-              <a:latin typeface="Arial" panose="020B0604020202020204" pitchFamily="34" charset="0"/>
-              <a:cs typeface="Arial" panose="020B0604020202020204" pitchFamily="34" charset="0"/>
-            </a:endParaRPr>
-          </a:p>
-          <a:p>
-            <a:pPr algn="just"/>
-            <a:endParaRPr lang="en-US" sz="1200" dirty="0">
-              <a:latin typeface="Arial" panose="020B0604020202020204" pitchFamily="34" charset="0"/>
-              <a:cs typeface="Arial" panose="020B0604020202020204" pitchFamily="34" charset="0"/>
-            </a:endParaRPr>
-          </a:p>
-        </p:txBody>
-      </p:sp>
-      <p:sp>
-        <p:nvSpPr>
-          <p:cNvPr id="5" name="Rectángulo 4">
-            <a:extLst>
-              <a:ext uri="{FF2B5EF4-FFF2-40B4-BE49-F238E27FC236}">
-                <a16:creationId xmlns:a16="http://schemas.microsoft.com/office/drawing/2014/main" id="{E7488849-10A1-FB48-F511-E57B062CD7E2}"/>
-              </a:ext>
-            </a:extLst>
-          </p:cNvPr>
-          <p:cNvSpPr/>
-          <p:nvPr/>
-        </p:nvSpPr>
-        <p:spPr>
-          <a:xfrm>
-            <a:off x="609441" y="1447800"/>
-            <a:ext cx="5486559" cy="3306028"/>
-          </a:xfrm>
-          <a:prstGeom prst="rect">
-            <a:avLst/>
-          </a:prstGeom>
-          <a:noFill/>
-          <a:ln w="28575">
-            <a:solidFill>
-              <a:srgbClr val="E0700D"/>
-            </a:solidFill>
-          </a:ln>
-        </p:spPr>
-        <p:style>
-          <a:lnRef idx="2">
-            <a:schemeClr val="accent1">
-              <a:shade val="15000"/>
-            </a:schemeClr>
-          </a:lnRef>
-          <a:fillRef idx="1">
-            <a:schemeClr val="accent1"/>
-          </a:fillRef>
-          <a:effectRef idx="0">
-            <a:schemeClr val="accent1"/>
-          </a:effectRef>
-          <a:fontRef idx="minor">
-            <a:schemeClr val="lt1"/>
-          </a:fontRef>
-        </p:style>
-        <p:txBody>
-          <a:bodyPr rtlCol="0" anchor="ctr"/>
-          <a:lstStyle/>
-          <a:p>
-            <a:pPr algn="ctr"/>
-            <a:endParaRPr lang="en-US"/>
-          </a:p>
-        </p:txBody>
-      </p:sp>
-      <p:sp>
-        <p:nvSpPr>
-          <p:cNvPr id="6" name="Rectángulo 5">
-            <a:extLst>
-              <a:ext uri="{FF2B5EF4-FFF2-40B4-BE49-F238E27FC236}">
-                <a16:creationId xmlns:a16="http://schemas.microsoft.com/office/drawing/2014/main" id="{68726DAB-1B5F-39D1-63A0-BB708EA6E17F}"/>
-              </a:ext>
-            </a:extLst>
-          </p:cNvPr>
-          <p:cNvSpPr/>
-          <p:nvPr/>
-        </p:nvSpPr>
-        <p:spPr>
-          <a:xfrm>
-            <a:off x="6321424" y="1447800"/>
-            <a:ext cx="5486559" cy="3306028"/>
-          </a:xfrm>
-          <a:prstGeom prst="rect">
-            <a:avLst/>
-          </a:prstGeom>
-          <a:noFill/>
-          <a:ln w="28575">
-            <a:solidFill>
-              <a:srgbClr val="E0700D"/>
-            </a:solidFill>
-          </a:ln>
-        </p:spPr>
-        <p:style>
-          <a:lnRef idx="2">
-            <a:schemeClr val="accent1">
-              <a:shade val="15000"/>
-            </a:schemeClr>
-          </a:lnRef>
-          <a:fillRef idx="1">
-            <a:schemeClr val="accent1"/>
-          </a:fillRef>
-          <a:effectRef idx="0">
-            <a:schemeClr val="accent1"/>
-          </a:effectRef>
-          <a:fontRef idx="minor">
-            <a:schemeClr val="lt1"/>
-          </a:fontRef>
-        </p:style>
-        <p:txBody>
-          <a:bodyPr rtlCol="0" anchor="ctr"/>
-          <a:lstStyle/>
-          <a:p>
-            <a:pPr algn="ctr"/>
-            <a:endParaRPr lang="en-US"/>
-          </a:p>
-        </p:txBody>
-      </p:sp>
-      <p:sp>
-        <p:nvSpPr>
-          <p:cNvPr id="7" name="CuadroTexto 6">
-            <a:extLst>
-              <a:ext uri="{FF2B5EF4-FFF2-40B4-BE49-F238E27FC236}">
-                <a16:creationId xmlns:a16="http://schemas.microsoft.com/office/drawing/2014/main" id="{6D309BFB-98FD-0CBA-3C6A-346D8859893B}"/>
-              </a:ext>
-            </a:extLst>
-          </p:cNvPr>
-          <p:cNvSpPr txBox="1"/>
-          <p:nvPr/>
-        </p:nvSpPr>
-        <p:spPr>
-          <a:xfrm>
-            <a:off x="6331152" y="4342178"/>
-            <a:ext cx="2269787" cy="369332"/>
-          </a:xfrm>
-          <a:prstGeom prst="rect">
-            <a:avLst/>
-          </a:prstGeom>
-          <a:noFill/>
-        </p:spPr>
-        <p:txBody>
-          <a:bodyPr wrap="square">
-            <a:spAutoFit/>
-          </a:bodyPr>
-          <a:lstStyle/>
-          <a:p>
-            <a:r>
-              <a:rPr lang="en-US" dirty="0"/>
-              <a:t>slab = 150nm</a:t>
-            </a:r>
-            <a:endParaRPr lang="es-ES" dirty="0"/>
-          </a:p>
-        </p:txBody>
-      </p:sp>
-      <mc:AlternateContent xmlns:mc="http://schemas.openxmlformats.org/markup-compatibility/2006" xmlns:a14="http://schemas.microsoft.com/office/drawing/2010/main">
-        <mc:Choice Requires="a14">
-          <p:sp>
-            <p:nvSpPr>
-              <p:cNvPr id="8" name="CuadroTexto 7">
-                <a:extLst>
-                  <a:ext uri="{FF2B5EF4-FFF2-40B4-BE49-F238E27FC236}">
-                    <a16:creationId xmlns:a16="http://schemas.microsoft.com/office/drawing/2014/main" id="{E9BD6C85-02F1-7B54-41E3-E3D9883786D8}"/>
-                  </a:ext>
-                </a:extLst>
-              </p:cNvPr>
-              <p:cNvSpPr txBox="1"/>
-              <p:nvPr/>
-            </p:nvSpPr>
-            <p:spPr>
-              <a:xfrm>
-                <a:off x="1079403" y="2709096"/>
-                <a:ext cx="4546634" cy="923330"/>
-              </a:xfrm>
-              <a:prstGeom prst="rect">
-                <a:avLst/>
-              </a:prstGeom>
-              <a:noFill/>
-            </p:spPr>
-            <p:txBody>
-              <a:bodyPr wrap="square" rtlCol="0">
-                <a:spAutoFit/>
-              </a:bodyPr>
-              <a:lstStyle/>
-              <a:p>
-                <a:pPr algn="ctr"/>
-                <a:r>
-                  <a:rPr lang="en-US" b="1" dirty="0"/>
-                  <a:t>deep</a:t>
-                </a:r>
-                <a:r>
-                  <a:rPr lang="en-US" dirty="0"/>
-                  <a:t> waveguide</a:t>
-                </a:r>
-              </a:p>
-              <a:p>
-                <a:pPr algn="ctr"/>
-                <a:endParaRPr lang="en-US" dirty="0"/>
-              </a:p>
-              <a:p>
-                <a:pPr algn="ctr"/>
-                <a:r>
-                  <a:rPr lang="en-US" dirty="0"/>
-                  <a:t>Paste </a:t>
-                </a:r>
-                <a14:m>
-                  <m:oMath xmlns:m="http://schemas.openxmlformats.org/officeDocument/2006/math">
-                    <m:sSub>
-                      <m:sSubPr>
-                        <m:ctrlPr>
-                          <a:rPr lang="es-ES" sz="1800" b="0" i="1" smtClean="0">
-                            <a:latin typeface="Cambria Math" panose="02040503050406030204" pitchFamily="18" charset="0"/>
-                          </a:rPr>
-                        </m:ctrlPr>
-                      </m:sSubPr>
-                      <m:e>
-                        <m:r>
-                          <a:rPr lang="es-ES" sz="1800" b="0" i="1" smtClean="0">
-                            <a:latin typeface="Cambria Math" panose="02040503050406030204" pitchFamily="18" charset="0"/>
-                          </a:rPr>
-                          <m:t>𝐿</m:t>
-                        </m:r>
-                      </m:e>
-                      <m:sub>
-                        <m:r>
-                          <a:rPr lang="es-ES" sz="1800" b="0" i="1" smtClean="0">
-                            <a:latin typeface="Cambria Math" panose="02040503050406030204" pitchFamily="18" charset="0"/>
-                          </a:rPr>
-                          <m:t>𝜋</m:t>
-                        </m:r>
-                      </m:sub>
-                    </m:sSub>
-                  </m:oMath>
-                </a14:m>
-                <a:r>
-                  <a:rPr lang="en-US" dirty="0"/>
-                  <a:t> vs gap for TE and TM plot here</a:t>
-                </a:r>
-              </a:p>
-            </p:txBody>
-          </p:sp>
-        </mc:Choice>
-        <mc:Fallback xmlns="">
-          <p:sp>
-            <p:nvSpPr>
-              <p:cNvPr id="8" name="CuadroTexto 7">
-                <a:extLst>
-                  <a:ext uri="{FF2B5EF4-FFF2-40B4-BE49-F238E27FC236}">
-                    <a16:creationId xmlns:a16="http://schemas.microsoft.com/office/drawing/2014/main" id="{E9BD6C85-02F1-7B54-41E3-E3D9883786D8}"/>
-                  </a:ext>
-                </a:extLst>
-              </p:cNvPr>
-              <p:cNvSpPr txBox="1">
-                <a:spLocks noRot="1" noChangeAspect="1" noMove="1" noResize="1" noEditPoints="1" noAdjustHandles="1" noChangeArrowheads="1" noChangeShapeType="1" noTextEdit="1"/>
-              </p:cNvSpPr>
-              <p:nvPr/>
-            </p:nvSpPr>
-            <p:spPr>
-              <a:xfrm>
-                <a:off x="1079403" y="2709096"/>
-                <a:ext cx="4546634" cy="923330"/>
-              </a:xfrm>
-              <a:prstGeom prst="rect">
-                <a:avLst/>
-              </a:prstGeom>
-              <a:blipFill>
-                <a:blip r:embed="rId5"/>
-                <a:stretch>
-                  <a:fillRect t="-3289" b="-9211"/>
-                </a:stretch>
-              </a:blipFill>
-            </p:spPr>
-            <p:txBody>
-              <a:bodyPr/>
-              <a:lstStyle/>
-              <a:p>
-                <a:r>
-                  <a:rPr lang="es-ES">
-                    <a:noFill/>
-                  </a:rPr>
-                  <a:t> </a:t>
-                </a:r>
-              </a:p>
-            </p:txBody>
-          </p:sp>
-        </mc:Fallback>
-      </mc:AlternateContent>
-      <mc:AlternateContent xmlns:mc="http://schemas.openxmlformats.org/markup-compatibility/2006" xmlns:a14="http://schemas.microsoft.com/office/drawing/2010/main">
-        <mc:Choice Requires="a14">
-          <p:sp>
-            <p:nvSpPr>
-              <p:cNvPr id="9" name="CuadroTexto 8">
-                <a:extLst>
-                  <a:ext uri="{FF2B5EF4-FFF2-40B4-BE49-F238E27FC236}">
-                    <a16:creationId xmlns:a16="http://schemas.microsoft.com/office/drawing/2014/main" id="{7431A41C-EEB3-44D0-4622-A915E258C8F0}"/>
-                  </a:ext>
-                </a:extLst>
-              </p:cNvPr>
-              <p:cNvSpPr txBox="1"/>
-              <p:nvPr/>
-            </p:nvSpPr>
-            <p:spPr>
-              <a:xfrm>
-                <a:off x="6883366" y="2709096"/>
-                <a:ext cx="4546634" cy="923330"/>
-              </a:xfrm>
-              <a:prstGeom prst="rect">
-                <a:avLst/>
-              </a:prstGeom>
-              <a:noFill/>
-            </p:spPr>
-            <p:txBody>
-              <a:bodyPr wrap="square" rtlCol="0">
-                <a:spAutoFit/>
-              </a:bodyPr>
-              <a:lstStyle/>
-              <a:p>
-                <a:pPr algn="ctr"/>
-                <a:r>
-                  <a:rPr lang="en-US" b="1" dirty="0"/>
-                  <a:t>shallow</a:t>
-                </a:r>
-                <a:r>
-                  <a:rPr lang="en-US" dirty="0"/>
-                  <a:t> waveguide</a:t>
-                </a:r>
-              </a:p>
-              <a:p>
-                <a:pPr algn="ctr"/>
-                <a:endParaRPr lang="en-US" dirty="0"/>
-              </a:p>
-              <a:p>
-                <a:pPr algn="ctr"/>
-                <a:r>
-                  <a:rPr lang="en-US" dirty="0"/>
-                  <a:t>Paste </a:t>
-                </a:r>
-                <a14:m>
-                  <m:oMath xmlns:m="http://schemas.openxmlformats.org/officeDocument/2006/math">
-                    <m:sSub>
-                      <m:sSubPr>
-                        <m:ctrlPr>
-                          <a:rPr lang="es-ES" sz="1800" b="0" i="1" smtClean="0">
-                            <a:latin typeface="Cambria Math" panose="02040503050406030204" pitchFamily="18" charset="0"/>
-                          </a:rPr>
-                        </m:ctrlPr>
-                      </m:sSubPr>
-                      <m:e>
-                        <m:r>
-                          <a:rPr lang="es-ES" sz="1800" b="0" i="1" smtClean="0">
-                            <a:latin typeface="Cambria Math" panose="02040503050406030204" pitchFamily="18" charset="0"/>
-                          </a:rPr>
-                          <m:t>𝐿</m:t>
-                        </m:r>
-                      </m:e>
-                      <m:sub>
-                        <m:r>
-                          <a:rPr lang="es-ES" sz="1800" b="0" i="1" smtClean="0">
-                            <a:latin typeface="Cambria Math" panose="02040503050406030204" pitchFamily="18" charset="0"/>
-                          </a:rPr>
-                          <m:t>𝜋</m:t>
-                        </m:r>
-                      </m:sub>
-                    </m:sSub>
-                  </m:oMath>
-                </a14:m>
-                <a:r>
-                  <a:rPr lang="en-US" dirty="0"/>
-                  <a:t> vs gap for TE and TM plot here</a:t>
-                </a:r>
-              </a:p>
-            </p:txBody>
-          </p:sp>
-        </mc:Choice>
-        <mc:Fallback xmlns="">
-          <p:sp>
-            <p:nvSpPr>
-              <p:cNvPr id="9" name="CuadroTexto 8">
-                <a:extLst>
-                  <a:ext uri="{FF2B5EF4-FFF2-40B4-BE49-F238E27FC236}">
-                    <a16:creationId xmlns:a16="http://schemas.microsoft.com/office/drawing/2014/main" id="{7431A41C-EEB3-44D0-4622-A915E258C8F0}"/>
-                  </a:ext>
-                </a:extLst>
-              </p:cNvPr>
-              <p:cNvSpPr txBox="1">
-                <a:spLocks noRot="1" noChangeAspect="1" noMove="1" noResize="1" noEditPoints="1" noAdjustHandles="1" noChangeArrowheads="1" noChangeShapeType="1" noTextEdit="1"/>
-              </p:cNvSpPr>
-              <p:nvPr/>
-            </p:nvSpPr>
-            <p:spPr>
-              <a:xfrm>
-                <a:off x="6883366" y="2709096"/>
-                <a:ext cx="4546634" cy="923330"/>
-              </a:xfrm>
-              <a:prstGeom prst="rect">
-                <a:avLst/>
-              </a:prstGeom>
-              <a:blipFill>
-                <a:blip r:embed="rId6"/>
-                <a:stretch>
-                  <a:fillRect t="-3289" b="-9211"/>
-                </a:stretch>
-              </a:blipFill>
-            </p:spPr>
-            <p:txBody>
-              <a:bodyPr/>
-              <a:lstStyle/>
-              <a:p>
-                <a:r>
-                  <a:rPr lang="es-ES">
-                    <a:noFill/>
-                  </a:rPr>
-                  <a:t> </a:t>
-                </a:r>
-              </a:p>
-            </p:txBody>
-          </p:sp>
-        </mc:Fallback>
-      </mc:AlternateContent>
-    </p:spTree>
-    <p:extLst>
-      <p:ext uri="{BB962C8B-B14F-4D97-AF65-F5344CB8AC3E}">
-        <p14:creationId xmlns:p14="http://schemas.microsoft.com/office/powerpoint/2010/main" val="179796361"/>
       </p:ext>
     </p:extLst>
   </p:cSld>
@@ -11688,7 +11688,7 @@
             </a:br>
             <a:r>
               <a:rPr lang="en-US" b="0" dirty="0"/>
-              <a:t>Wavelength 1.5 µm – width 1.2 µm – gap 0.6 µm</a:t>
+              <a:t>Wavelength 1.5 µm – width 1.2 µm – gap 0.6 µm – thickness 300 nm</a:t>
             </a:r>
             <a:endParaRPr lang="en-US" sz="2500" b="0" dirty="0">
               <a:latin typeface="+mj-lt"/>
@@ -12113,7 +12113,7 @@
             </a:br>
             <a:r>
               <a:rPr lang="en-US" b="0" dirty="0"/>
-              <a:t>Width 0.6 - 1.6 µm (step 0.1 µm) – Wavelength 1.55 µm </a:t>
+              <a:t>Wavelength 1.55 µm – Sweep gaps between 0.2 and 1.2 µm in steps of 0.2 µm</a:t>
             </a:r>
             <a:endParaRPr lang="en-US" sz="2500" b="0" dirty="0">
               <a:latin typeface="+mj-lt"/>
@@ -12498,7 +12498,7 @@
             </a:pPr>
             <a:r>
               <a:rPr lang="en-US" sz="2500" dirty="0"/>
-              <a:t>Learning outcome #4 – Parallel uncoupled waveguides</a:t>
+              <a:t>Learning outcome #4 – Parallel uncoupled waveguides – TE0 mode</a:t>
             </a:r>
             <a:br>
               <a:rPr lang="en-US" sz="2500" spc="-5" dirty="0">
@@ -12970,8 +12970,8 @@
           </p:sp>
         </mc:Fallback>
       </mc:AlternateContent>
-      <mc:AlternateContent xmlns:mc="http://schemas.openxmlformats.org/markup-compatibility/2006" xmlns:a14="http://schemas.microsoft.com/office/drawing/2010/main">
-        <mc:Choice Requires="a14">
+      <mc:AlternateContent xmlns:mc="http://schemas.openxmlformats.org/markup-compatibility/2006">
+        <mc:Choice xmlns:a14="http://schemas.microsoft.com/office/drawing/2010/main" Requires="a14">
           <p:sp>
             <p:nvSpPr>
               <p:cNvPr id="10" name="CuadroTexto 9">
@@ -12987,7 +12987,7 @@
             <p:spPr>
               <a:xfrm>
                 <a:off x="6883366" y="2480496"/>
-                <a:ext cx="4546634" cy="1200329"/>
+                <a:ext cx="4546634" cy="1477328"/>
               </a:xfrm>
               <a:prstGeom prst="rect">
                 <a:avLst/>
@@ -13008,6 +13008,17 @@
                 <a:r>
                   <a:rPr lang="en-US" dirty="0"/>
                   <a:t> waveguide</a:t>
+                </a:r>
+              </a:p>
+              <a:p>
+                <a:pPr algn="ctr"/>
+                <a:r>
+                  <a:rPr lang="en-US" dirty="0" err="1"/>
+                  <a:t>slab_thickness</a:t>
+                </a:r>
+                <a:r>
+                  <a:rPr lang="en-US" dirty="0"/>
+                  <a:t> = 150 nm</a:t>
                 </a:r>
               </a:p>
               <a:p>
@@ -13046,7 +13057,7 @@
             </p:txBody>
           </p:sp>
         </mc:Choice>
-        <mc:Fallback xmlns="">
+        <mc:Fallback>
           <p:sp>
             <p:nvSpPr>
               <p:cNvPr id="10" name="CuadroTexto 9">
@@ -13064,7 +13075,7 @@
             <p:spPr>
               <a:xfrm>
                 <a:off x="6883366" y="2480496"/>
-                <a:ext cx="4546634" cy="1200329"/>
+                <a:ext cx="4546634" cy="1477328"/>
               </a:xfrm>
               <a:prstGeom prst="rect">
                 <a:avLst/>
@@ -13072,7 +13083,7 @@
               <a:blipFill>
                 <a:blip r:embed="rId6"/>
                 <a:stretch>
-                  <a:fillRect t="-3046" b="-7107"/>
+                  <a:fillRect t="-2479" b="-5785"/>
                 </a:stretch>
               </a:blipFill>
             </p:spPr>
@@ -13417,8 +13428,8 @@
           </a:p>
         </p:txBody>
       </p:sp>
-      <mc:AlternateContent xmlns:mc="http://schemas.openxmlformats.org/markup-compatibility/2006" xmlns:a14="http://schemas.microsoft.com/office/drawing/2010/main">
-        <mc:Choice Requires="a14">
+      <mc:AlternateContent xmlns:mc="http://schemas.openxmlformats.org/markup-compatibility/2006">
+        <mc:Choice xmlns:a14="http://schemas.microsoft.com/office/drawing/2010/main" Requires="a14">
           <p:sp>
             <p:nvSpPr>
               <p:cNvPr id="4" name="Marcador de texto 2">
@@ -13545,7 +13556,7 @@
                 </a:pPr>
                 <a:r>
                   <a:rPr lang="en-US" sz="2000" dirty="0"/>
-                  <a:t>Describe how to obtain the beating length </a:t>
+                  <a:t>Describe how to obtain the length </a:t>
                 </a:r>
                 <a14:m>
                   <m:oMath xmlns:m="http://schemas.openxmlformats.org/officeDocument/2006/math">
@@ -13652,7 +13663,7 @@
             </p:txBody>
           </p:sp>
         </mc:Choice>
-        <mc:Fallback xmlns="">
+        <mc:Fallback>
           <p:sp>
             <p:nvSpPr>
               <p:cNvPr id="4" name="Marcador de texto 2">
